--- a/sept16-v204-assets/PRESENTER_VERSION_Stay_or_Leave_Live_Career_Growth_Assessment_60MIN_v2.0.4_CANDIDATE.pptx
+++ b/sept16-v204-assets/PRESENTER_VERSION_Stay_or_Leave_Live_Career_Growth_Assessment_60MIN_v2.0.4_CANDIDATE.pptx
@@ -1928,9 +1928,9 @@
               <a:rPr lang="en-US" dirty="0"/>
               <a:t>RECORDING ON.
 TIMING: 45:00-46:00. SIXTY SECONDS. The whole continuation sequence is three minutes and it is the first place to take time from if you are behind.
-FACILITATION: read the three routes in order, land route one, then move. Do not linger and do not add examples.
+FACILITATION: read the two routes in order, land route one, then move. Do not linger and do not add examples.
 ROUTE 1 IS NOT A THROWAWAY. Say it first and say it plainly. The credibility of the next slide depends on genuinely releasing the people who have enough.
-WHAT TO SAY: "Some of you now have enough to act. Good — you do not need anything else from me today. Some of you want a system to keep working with. And some of you can read the position but the decision is still complicated. Different needs, different routes."
+WHAT TO SAY: "Some of you now have enough to act. Good — you do not need anything else from me today. Some of you want a structured system you can keep working with privately. Different needs, different routes."
 NO PRICING ON THIS SLIDE. Do not say "if you want to buy", "I have two offers" or "special opportunity".</a:t>
             </a:r>
             <a:endParaRPr lang="en-US" dirty="0"/>
@@ -16013,48 +16013,9 @@
           </a:prstGeom>
         </p:spPr>
       </p:pic>
-      <p:sp>
-        <p:nvSpPr>
-          <p:cNvPr id="26" name="Text 23"/>
-          <p:cNvSpPr/>
-          <p:nvPr/>
-        </p:nvSpPr>
-        <p:spPr>
-          <a:xfrm>
-            <a:off x="7717536" y="2798064"/>
-            <a:ext cx="877824" cy="164592"/>
-          </a:xfrm>
-          <a:prstGeom prst="rect">
-            <a:avLst/>
-          </a:prstGeom>
-          <a:noFill/>
-          <a:ln/>
-        </p:spPr>
-        <p:txBody>
-          <a:bodyPr wrap="square" lIns="0" tIns="0" rIns="0" bIns="0" rtlCol="0" anchor="ctr"/>
-          <a:lstStyle/>
-          <a:p>
-            <a:pPr algn="ctr" indent="0" marL="0">
-              <a:buNone/>
-            </a:pPr>
-            <a:r>
-              <a:rPr lang="en-US" sz="720" i="1" dirty="0">
-                <a:solidFill>
-                  <a:srgbClr val="B8C5D9"/>
-                </a:solidFill>
-                <a:latin typeface="DM Sans" pitchFamily="34" charset="0"/>
-                <a:ea typeface="DM Sans" pitchFamily="34" charset="-122"/>
-                <a:cs typeface="DM Sans" pitchFamily="34" charset="-120"/>
-              </a:rPr>
-              <a:t>The shipped kit</a:t>
-            </a:r>
-            <a:endParaRPr lang="en-US" sz="720" dirty="0"/>
-          </a:p>
-        </p:txBody>
-      </p:sp>
       <p:pic>
         <p:nvPicPr>
-          <p:cNvPr id="27" name="Image 1" descr="preencoded.png">
+          <p:cNvPr id="26" name="Image 1" descr="preencoded.png">
             <a:hlinkClick r:id="rId3" tooltip=""/>
           </p:cNvPr>
           <p:cNvPicPr>
@@ -16080,7 +16041,7 @@
       </p:pic>
       <p:sp>
         <p:nvSpPr>
-          <p:cNvPr id="28" name="Text 24">
+          <p:cNvPr id="27" name="Text 23">
             <a:hlinkClick r:id="rId4" tooltip=""/>
           </p:cNvPr>
           <p:cNvSpPr/>
@@ -16128,7 +16089,7 @@
       </p:sp>
       <p:sp>
         <p:nvSpPr>
-          <p:cNvPr id="29" name="Text 25">
+          <p:cNvPr id="28" name="Text 24">
             <a:hlinkClick r:id="rId5" tooltip=""/>
           </p:cNvPr>
           <p:cNvSpPr/>
@@ -16176,7 +16137,7 @@
       </p:sp>
       <p:sp>
         <p:nvSpPr>
-          <p:cNvPr id="30" name="Text 26"/>
+          <p:cNvPr id="29" name="Text 25"/>
           <p:cNvSpPr/>
           <p:nvPr/>
         </p:nvSpPr>
@@ -16215,7 +16176,7 @@
       </p:sp>
       <p:sp>
         <p:nvSpPr>
-          <p:cNvPr id="32" name="Text 27"/>
+          <p:cNvPr id="31" name="Text 26"/>
           <p:cNvSpPr/>
           <p:nvPr/>
         </p:nvSpPr>
@@ -16254,7 +16215,7 @@
       </p:sp>
       <p:sp>
         <p:nvSpPr>
-          <p:cNvPr id="33" name="Text 28"/>
+          <p:cNvPr id="32" name="Text 27"/>
           <p:cNvSpPr/>
           <p:nvPr/>
         </p:nvSpPr>
